--- a/assets/figures-editable/c3-c4/c4-e12.pptx
+++ b/assets/figures-editable/c3-c4/c4-e12.pptx
@@ -3104,8 +3104,8 @@
         </p:nvSpPr>
         <p:spPr>
           <a:xfrm>
-            <a:off x="274320" y="137160"/>
-            <a:ext cx="11612880" cy="365760"/>
+            <a:off x="274320" y="118872"/>
+            <a:ext cx="11612880" cy="340105"/>
           </a:xfrm>
           <a:prstGeom prst="rect">
             <a:avLst/>
@@ -3114,7 +3114,7 @@
           <a:effectLst/>
         </p:spPr>
         <p:txBody>
-          <a:bodyPr wrap="square" lIns="27432" rIns="27432" tIns="18288" bIns="18288" anchor="ctr">
+          <a:bodyPr wrap="none" lIns="18288" rIns="18288" tIns="18288" bIns="18288" anchor="t">
             <a:spAutoFit/>
           </a:bodyPr>
           <a:lstStyle/>
@@ -3125,7 +3125,7 @@
               </a:spcAft>
             </a:pPr>
             <a:r>
-              <a:rPr sz="2100" b="0" i="0">
+              <a:rPr sz="1900" b="1" i="0">
                 <a:solidFill>
                   <a:srgbClr val="8EDBD4"/>
                 </a:solidFill>
@@ -3138,21 +3138,58 @@
       </p:sp>
       <p:sp>
         <p:nvSpPr>
-          <p:cNvPr id="3" name="C4-E12 rect 1" descr="sci-ppt:o001"/>
-          <p:cNvSpPr/>
+          <p:cNvPr id="3" name="C4-E12 text 1" descr="sci-ppt:o001"/>
+          <p:cNvSpPr txBox="1"/>
           <p:nvPr/>
         </p:nvSpPr>
         <p:spPr>
           <a:xfrm>
-            <a:off x="594360" y="1417320"/>
-            <a:ext cx="3200400" cy="1325880"/>
+            <a:off x="457200" y="914400"/>
+            <a:ext cx="5486400" cy="254889"/>
           </a:xfrm>
           <a:prstGeom prst="rect">
             <a:avLst/>
           </a:prstGeom>
-          <a:solidFill>
-            <a:srgbClr val="213E4B"/>
-          </a:solidFill>
+          <a:noFill/>
+          <a:effectLst/>
+        </p:spPr>
+        <p:txBody>
+          <a:bodyPr wrap="none" lIns="18288" rIns="18288" tIns="18288" bIns="18288" anchor="t">
+            <a:spAutoFit/>
+          </a:bodyPr>
+          <a:lstStyle/>
+          <a:p>
+            <a:pPr algn="l">
+              <a:spcAft>
+                <a:spcPts val="0"/>
+              </a:spcAft>
+            </a:pPr>
+            <a:r>
+              <a:rPr sz="1350" b="1" i="0">
+                <a:solidFill>
+                  <a:srgbClr val="8EDBD4"/>
+                </a:solidFill>
+                <a:latin typeface="Arial"/>
+              </a:rPr>
+              <a:t>Where the load power goes (schematic share)</a:t>
+            </a:r>
+          </a:p>
+        </p:txBody>
+      </p:sp>
+      <p:cxnSp>
+        <p:nvCxnSpPr>
+          <p:cNvPr id="4" name="C4-E12 line 2" descr="sci-ppt:o002"/>
+          <p:cNvCxnSpPr/>
+          <p:nvPr/>
+        </p:nvCxnSpPr>
+        <p:spPr>
+          <a:xfrm>
+            <a:off x="640080" y="4572000"/>
+            <a:ext cx="5486400" cy="0"/>
+          </a:xfrm>
+          <a:prstGeom prst="line">
+            <a:avLst/>
+          </a:prstGeom>
           <a:ln w="19050">
             <a:solidFill>
               <a:srgbClr val="B4C7D2"/>
@@ -3160,95 +3197,21 @@
           </a:ln>
           <a:effectLst/>
         </p:spPr>
-        <p:txBody>
-          <a:bodyPr rtlCol="0" anchor="ctr"/>
-          <a:lstStyle/>
-          <a:p>
-            <a:pPr algn="ctr"/>
-          </a:p>
-        </p:txBody>
-      </p:sp>
-      <p:sp>
-        <p:nvSpPr>
-          <p:cNvPr id="4" name="C4-E12 text 2" descr="sci-ppt:o002"/>
-          <p:cNvSpPr txBox="1"/>
-          <p:nvPr/>
-        </p:nvSpPr>
-        <p:spPr>
-          <a:xfrm>
-            <a:off x="758952" y="1627632"/>
-            <a:ext cx="2871216" cy="914400"/>
-          </a:xfrm>
-          <a:prstGeom prst="rect">
-            <a:avLst/>
-          </a:prstGeom>
-          <a:noFill/>
-          <a:effectLst/>
-        </p:spPr>
-        <p:txBody>
-          <a:bodyPr wrap="square" lIns="27432" rIns="27432" tIns="18288" bIns="18288" anchor="ctr">
-            <a:spAutoFit/>
-          </a:bodyPr>
-          <a:lstStyle/>
-          <a:p>
-            <a:pPr algn="l">
-              <a:spcAft>
-                <a:spcPts val="0"/>
-              </a:spcAft>
-            </a:pPr>
-            <a:r>
-              <a:rPr sz="1800" b="0" i="0">
-                <a:solidFill>
-                  <a:srgbClr val="E7F0F3"/>
-                </a:solidFill>
-                <a:latin typeface="Arial"/>
-              </a:rPr>
-              <a:t>Applied solid power</a:t>
-            </a:r>
-          </a:p>
-        </p:txBody>
-      </p:sp>
+      </p:cxnSp>
       <p:cxnSp>
         <p:nvCxnSpPr>
-          <p:cNvPr id="5" name="C4-E12 arrow 3" descr="sci-ppt:o003"/>
+          <p:cNvPr id="5" name="C4-E12 line 3" descr="sci-ppt:o003"/>
           <p:cNvCxnSpPr/>
           <p:nvPr/>
         </p:nvCxnSpPr>
         <p:spPr>
           <a:xfrm>
-            <a:off x="3794760" y="2057400"/>
-            <a:ext cx="640080" cy="0"/>
+            <a:off x="640080" y="1554480"/>
+            <a:ext cx="0" cy="3017520"/>
           </a:xfrm>
           <a:prstGeom prst="line">
             <a:avLst/>
           </a:prstGeom>
-          <a:ln w="25400">
-            <a:solidFill>
-              <a:srgbClr val="8EDBD4"/>
-            </a:solidFill>
-            <a:headEnd type="none" w="med" len="med"/>
-            <a:tailEnd type="triangle" w="med" len="med"/>
-          </a:ln>
-          <a:effectLst/>
-        </p:spPr>
-      </p:cxnSp>
-      <p:sp>
-        <p:nvSpPr>
-          <p:cNvPr id="6" name="C4-E12 rect 4" descr="sci-ppt:o004"/>
-          <p:cNvSpPr/>
-          <p:nvPr/>
-        </p:nvSpPr>
-        <p:spPr>
-          <a:xfrm>
-            <a:off x="4480560" y="1417320"/>
-            <a:ext cx="3200400" cy="1325880"/>
-          </a:xfrm>
-          <a:prstGeom prst="rect">
-            <a:avLst/>
-          </a:prstGeom>
-          <a:solidFill>
-            <a:srgbClr val="213E4B"/>
-          </a:solidFill>
           <a:ln w="19050">
             <a:solidFill>
               <a:srgbClr val="B4C7D2"/>
@@ -3256,24 +3219,61 @@
           </a:ln>
           <a:effectLst/>
         </p:spPr>
-        <p:txBody>
-          <a:bodyPr rtlCol="0" anchor="ctr"/>
-          <a:lstStyle/>
-          <a:p>
-            <a:pPr algn="ctr"/>
-          </a:p>
-        </p:txBody>
-      </p:sp>
-      <p:sp>
-        <p:nvSpPr>
-          <p:cNvPr id="7" name="C4-E12 text 5" descr="sci-ppt:o005"/>
+      </p:cxnSp>
+      <p:cxnSp>
+        <p:nvCxnSpPr>
+          <p:cNvPr id="6" name="C4-E12 line 4" descr="sci-ppt:o004"/>
+          <p:cNvCxnSpPr/>
+          <p:nvPr/>
+        </p:nvCxnSpPr>
+        <p:spPr>
+          <a:xfrm>
+            <a:off x="576071" y="4572000"/>
+            <a:ext cx="64009" cy="0"/>
+          </a:xfrm>
+          <a:prstGeom prst="line">
+            <a:avLst/>
+          </a:prstGeom>
+          <a:ln w="12700">
+            <a:solidFill>
+              <a:srgbClr val="B4C7D2"/>
+            </a:solidFill>
+          </a:ln>
+          <a:effectLst/>
+        </p:spPr>
+      </p:cxnSp>
+      <p:cxnSp>
+        <p:nvCxnSpPr>
+          <p:cNvPr id="7" name="C4-E12 line 5" descr="sci-ppt:o005"/>
+          <p:cNvCxnSpPr/>
+          <p:nvPr/>
+        </p:nvCxnSpPr>
+        <p:spPr>
+          <a:xfrm>
+            <a:off x="640080" y="4572000"/>
+            <a:ext cx="5486400" cy="0"/>
+          </a:xfrm>
+          <a:prstGeom prst="line">
+            <a:avLst/>
+          </a:prstGeom>
+          <a:ln w="7620">
+            <a:solidFill>
+              <a:srgbClr val="2E4756"/>
+            </a:solidFill>
+          </a:ln>
+          <a:effectLst/>
+        </p:spPr>
+      </p:cxnSp>
+      <p:sp>
+        <p:nvSpPr>
+          <p:cNvPr id="8" name="C4-E12 text 6" descr="sci-ppt:o006"/>
           <p:cNvSpPr txBox="1"/>
           <p:nvPr/>
         </p:nvSpPr>
         <p:spPr>
           <a:xfrm>
-            <a:off x="4645152" y="1627632"/>
-            <a:ext cx="2871216" cy="914400"/>
+            <a:off x="-228600" y="4489704"/>
+            <a:ext cx="777240" cy="208407"/>
           </a:xfrm>
           <a:prstGeom prst="rect">
             <a:avLst/>
@@ -3282,94 +3282,82 @@
           <a:effectLst/>
         </p:spPr>
         <p:txBody>
-          <a:bodyPr wrap="square" lIns="27432" rIns="27432" tIns="18288" bIns="18288" anchor="ctr">
+          <a:bodyPr wrap="none" lIns="18288" rIns="18288" tIns="18288" bIns="18288" anchor="t">
             <a:spAutoFit/>
           </a:bodyPr>
           <a:lstStyle/>
           <a:p>
-            <a:pPr algn="l">
+            <a:pPr algn="r">
               <a:spcAft>
                 <a:spcPts val="0"/>
               </a:spcAft>
             </a:pPr>
             <a:r>
-              <a:rPr sz="1800" b="0" i="0">
+              <a:rPr sz="1050" b="0" i="0">
                 <a:solidFill>
-                  <a:srgbClr val="E7F0F3"/>
+                  <a:srgbClr val="B4C7D2"/>
                 </a:solidFill>
                 <a:latin typeface="Arial"/>
               </a:rPr>
-              <a:t>Kinetic + elastic storage</a:t>
+              <a:t>0</a:t>
             </a:r>
           </a:p>
         </p:txBody>
       </p:sp>
       <p:cxnSp>
         <p:nvCxnSpPr>
-          <p:cNvPr id="8" name="C4-E12 arrow 6" descr="sci-ppt:o006"/>
+          <p:cNvPr id="9" name="C4-E12 line 7" descr="sci-ppt:o007"/>
           <p:cNvCxnSpPr/>
           <p:nvPr/>
         </p:nvCxnSpPr>
         <p:spPr>
           <a:xfrm>
-            <a:off x="7680960" y="2057400"/>
-            <a:ext cx="640080" cy="0"/>
+            <a:off x="576071" y="3314700"/>
+            <a:ext cx="64009" cy="0"/>
           </a:xfrm>
           <a:prstGeom prst="line">
             <a:avLst/>
           </a:prstGeom>
-          <a:ln w="25400">
-            <a:solidFill>
-              <a:srgbClr val="8EDBD4"/>
-            </a:solidFill>
-            <a:headEnd type="none" w="med" len="med"/>
-            <a:tailEnd type="triangle" w="med" len="med"/>
-          </a:ln>
-          <a:effectLst/>
-        </p:spPr>
-      </p:cxnSp>
-      <p:sp>
-        <p:nvSpPr>
-          <p:cNvPr id="9" name="C4-E12 rect 7" descr="sci-ppt:o007"/>
-          <p:cNvSpPr/>
-          <p:nvPr/>
-        </p:nvSpPr>
-        <p:spPr>
-          <a:xfrm>
-            <a:off x="8366760" y="1417320"/>
-            <a:ext cx="3200400" cy="1325880"/>
-          </a:xfrm>
-          <a:prstGeom prst="rect">
-            <a:avLst/>
-          </a:prstGeom>
-          <a:solidFill>
-            <a:srgbClr val="213E4B"/>
-          </a:solidFill>
-          <a:ln w="19050">
+          <a:ln w="12700">
             <a:solidFill>
               <a:srgbClr val="B4C7D2"/>
             </a:solidFill>
           </a:ln>
           <a:effectLst/>
         </p:spPr>
-        <p:txBody>
-          <a:bodyPr rtlCol="0" anchor="ctr"/>
-          <a:lstStyle/>
-          <a:p>
-            <a:pPr algn="ctr"/>
-          </a:p>
-        </p:txBody>
-      </p:sp>
-      <p:sp>
-        <p:nvSpPr>
-          <p:cNvPr id="10" name="C4-E12 text 8" descr="sci-ppt:o008"/>
+      </p:cxnSp>
+      <p:cxnSp>
+        <p:nvCxnSpPr>
+          <p:cNvPr id="10" name="C4-E12 line 8" descr="sci-ppt:o008"/>
+          <p:cNvCxnSpPr/>
+          <p:nvPr/>
+        </p:nvCxnSpPr>
+        <p:spPr>
+          <a:xfrm>
+            <a:off x="640080" y="3314700"/>
+            <a:ext cx="5486400" cy="0"/>
+          </a:xfrm>
+          <a:prstGeom prst="line">
+            <a:avLst/>
+          </a:prstGeom>
+          <a:ln w="7620">
+            <a:solidFill>
+              <a:srgbClr val="2E4756"/>
+            </a:solidFill>
+          </a:ln>
+          <a:effectLst/>
+        </p:spPr>
+      </p:cxnSp>
+      <p:sp>
+        <p:nvSpPr>
+          <p:cNvPr id="11" name="C4-E12 text 9" descr="sci-ppt:o009"/>
           <p:cNvSpPr txBox="1"/>
           <p:nvPr/>
         </p:nvSpPr>
         <p:spPr>
           <a:xfrm>
-            <a:off x="8531352" y="1627632"/>
-            <a:ext cx="2871216" cy="914400"/>
+            <a:off x="-228600" y="3232404"/>
+            <a:ext cx="777240" cy="208407"/>
           </a:xfrm>
           <a:prstGeom prst="rect">
             <a:avLst/>
@@ -3378,64 +3366,24 @@
           <a:effectLst/>
         </p:spPr>
         <p:txBody>
-          <a:bodyPr wrap="square" lIns="27432" rIns="27432" tIns="18288" bIns="18288" anchor="ctr">
+          <a:bodyPr wrap="none" lIns="18288" rIns="18288" tIns="18288" bIns="18288" anchor="t">
             <a:spAutoFit/>
           </a:bodyPr>
           <a:lstStyle/>
           <a:p>
-            <a:pPr algn="l">
+            <a:pPr algn="r">
               <a:spcAft>
                 <a:spcPts val="0"/>
               </a:spcAft>
             </a:pPr>
             <a:r>
-              <a:rPr sz="1800" b="0" i="0">
+              <a:rPr sz="1050" b="0" i="0">
                 <a:solidFill>
-                  <a:srgbClr val="E7F0F3"/>
+                  <a:srgbClr val="B4C7D2"/>
                 </a:solidFill>
                 <a:latin typeface="Arial"/>
               </a:rPr>
-              <a:t>Interface power + losses</a:t>
-            </a:r>
-          </a:p>
-        </p:txBody>
-      </p:sp>
-      <p:sp>
-        <p:nvSpPr>
-          <p:cNvPr id="11" name="C4-E12 text 9" descr="sci-ppt:o009"/>
-          <p:cNvSpPr txBox="1"/>
-          <p:nvPr/>
-        </p:nvSpPr>
-        <p:spPr>
-          <a:xfrm>
-            <a:off x="731520" y="3246120"/>
-            <a:ext cx="10789920" cy="457200"/>
-          </a:xfrm>
-          <a:prstGeom prst="rect">
-            <a:avLst/>
-          </a:prstGeom>
-          <a:noFill/>
-          <a:effectLst/>
-        </p:spPr>
-        <p:txBody>
-          <a:bodyPr wrap="square" lIns="27432" rIns="27432" tIns="18288" bIns="18288" anchor="ctr">
-            <a:spAutoFit/>
-          </a:bodyPr>
-          <a:lstStyle/>
-          <a:p>
-            <a:pPr algn="l">
-              <a:spcAft>
-                <a:spcPts val="0"/>
-              </a:spcAft>
-            </a:pPr>
-            <a:r>
-              <a:rPr sz="1800" b="0" i="0">
-                <a:solidFill>
-                  <a:srgbClr val="8EDBD4"/>
-                </a:solidFill>
-                <a:latin typeface="Arial"/>
-              </a:rPr>
-              <a:t>Work, storage, fracture consumption and net impulse retain separate meanings.</a:t>
+              <a:t>0.5</a:t>
             </a:r>
           </a:p>
         </p:txBody>
@@ -3448,30 +3396,52 @@
         </p:nvCxnSpPr>
         <p:spPr>
           <a:xfrm>
-            <a:off x="274320" y="3977639"/>
-            <a:ext cx="11612880" cy="0"/>
+            <a:off x="576071" y="2057400"/>
+            <a:ext cx="64009" cy="0"/>
           </a:xfrm>
           <a:prstGeom prst="line">
             <a:avLst/>
           </a:prstGeom>
           <a:ln w="12700">
             <a:solidFill>
-              <a:srgbClr val="405967"/>
+              <a:srgbClr val="B4C7D2"/>
             </a:solidFill>
           </a:ln>
           <a:effectLst/>
         </p:spPr>
       </p:cxnSp>
-      <p:sp>
-        <p:nvSpPr>
-          <p:cNvPr id="13" name="C4-E12 text 11" descr="sci-ppt:o011"/>
+      <p:cxnSp>
+        <p:nvCxnSpPr>
+          <p:cNvPr id="13" name="C4-E12 line 11" descr="sci-ppt:o011"/>
+          <p:cNvCxnSpPr/>
+          <p:nvPr/>
+        </p:nvCxnSpPr>
+        <p:spPr>
+          <a:xfrm>
+            <a:off x="640080" y="2057400"/>
+            <a:ext cx="5486400" cy="0"/>
+          </a:xfrm>
+          <a:prstGeom prst="line">
+            <a:avLst/>
+          </a:prstGeom>
+          <a:ln w="7620">
+            <a:solidFill>
+              <a:srgbClr val="2E4756"/>
+            </a:solidFill>
+          </a:ln>
+          <a:effectLst/>
+        </p:spPr>
+      </p:cxnSp>
+      <p:sp>
+        <p:nvSpPr>
+          <p:cNvPr id="14" name="C4-E12 text 12" descr="sci-ppt:o012"/>
           <p:cNvSpPr txBox="1"/>
           <p:nvPr/>
         </p:nvSpPr>
         <p:spPr>
           <a:xfrm>
-            <a:off x="320040" y="4096512"/>
-            <a:ext cx="5715000" cy="246888"/>
+            <a:off x="-228600" y="1975104"/>
+            <a:ext cx="777240" cy="208407"/>
           </a:xfrm>
           <a:prstGeom prst="rect">
             <a:avLst/>
@@ -3480,7 +3450,675 @@
           <a:effectLst/>
         </p:spPr>
         <p:txBody>
-          <a:bodyPr wrap="square" lIns="27432" rIns="27432" tIns="18288" bIns="18288" anchor="ctr">
+          <a:bodyPr wrap="none" lIns="18288" rIns="18288" tIns="18288" bIns="18288" anchor="t">
+            <a:spAutoFit/>
+          </a:bodyPr>
+          <a:lstStyle/>
+          <a:p>
+            <a:pPr algn="r">
+              <a:spcAft>
+                <a:spcPts val="0"/>
+              </a:spcAft>
+            </a:pPr>
+            <a:r>
+              <a:rPr sz="1050" b="0" i="0">
+                <a:solidFill>
+                  <a:srgbClr val="B4C7D2"/>
+                </a:solidFill>
+                <a:latin typeface="Arial"/>
+              </a:rPr>
+              <a:t>1</a:t>
+            </a:r>
+          </a:p>
+        </p:txBody>
+      </p:sp>
+      <p:sp>
+        <p:nvSpPr>
+          <p:cNvPr id="15" name="C4-E12 rect 13" descr="sci-ppt:o013"/>
+          <p:cNvSpPr/>
+          <p:nvPr/>
+        </p:nvSpPr>
+        <p:spPr>
+          <a:xfrm>
+            <a:off x="793699" y="2057400"/>
+            <a:ext cx="790041" cy="2514600"/>
+          </a:xfrm>
+          <a:prstGeom prst="rect">
+            <a:avLst/>
+          </a:prstGeom>
+          <a:solidFill>
+            <a:srgbClr val="8EDBD4">
+              <a:alpha val="85000"/>
+            </a:srgbClr>
+          </a:solidFill>
+          <a:ln w="12700">
+            <a:solidFill>
+              <a:srgbClr val="8EDBD4">
+                <a:alpha val="85000"/>
+              </a:srgbClr>
+            </a:solidFill>
+          </a:ln>
+          <a:effectLst/>
+        </p:spPr>
+        <p:txBody>
+          <a:bodyPr rtlCol="0" anchor="ctr"/>
+          <a:lstStyle/>
+          <a:p>
+            <a:pPr algn="ctr"/>
+          </a:p>
+        </p:txBody>
+      </p:sp>
+      <p:sp>
+        <p:nvSpPr>
+          <p:cNvPr id="16" name="C4-E12 text 14" descr="sci-ppt:o014"/>
+          <p:cNvSpPr txBox="1"/>
+          <p:nvPr/>
+        </p:nvSpPr>
+        <p:spPr>
+          <a:xfrm>
+            <a:off x="565099" y="1783080"/>
+            <a:ext cx="1247241" cy="223900"/>
+          </a:xfrm>
+          <a:prstGeom prst="rect">
+            <a:avLst/>
+          </a:prstGeom>
+          <a:noFill/>
+          <a:effectLst/>
+        </p:spPr>
+        <p:txBody>
+          <a:bodyPr wrap="none" lIns="18288" rIns="18288" tIns="18288" bIns="18288" anchor="t">
+            <a:spAutoFit/>
+          </a:bodyPr>
+          <a:lstStyle/>
+          <a:p>
+            <a:pPr algn="ctr">
+              <a:spcAft>
+                <a:spcPts val="0"/>
+              </a:spcAft>
+            </a:pPr>
+            <a:r>
+              <a:rPr sz="1150" b="1" i="0">
+                <a:solidFill>
+                  <a:srgbClr val="E7F0F3"/>
+                </a:solidFill>
+                <a:latin typeface="Arial"/>
+              </a:rPr>
+              <a:t>1.00</a:t>
+            </a:r>
+          </a:p>
+        </p:txBody>
+      </p:sp>
+      <p:sp>
+        <p:nvSpPr>
+          <p:cNvPr id="17" name="C4-E12 text 15" descr="sci-ppt:o015"/>
+          <p:cNvSpPr txBox="1"/>
+          <p:nvPr/>
+        </p:nvSpPr>
+        <p:spPr>
+          <a:xfrm>
+            <a:off x="519379" y="4645152"/>
+            <a:ext cx="1338681" cy="216153"/>
+          </a:xfrm>
+          <a:prstGeom prst="rect">
+            <a:avLst/>
+          </a:prstGeom>
+          <a:noFill/>
+          <a:effectLst/>
+        </p:spPr>
+        <p:txBody>
+          <a:bodyPr wrap="none" lIns="18288" rIns="18288" tIns="18288" bIns="18288" anchor="t">
+            <a:spAutoFit/>
+          </a:bodyPr>
+          <a:lstStyle/>
+          <a:p>
+            <a:pPr algn="ctr">
+              <a:spcAft>
+                <a:spcPts val="0"/>
+              </a:spcAft>
+            </a:pPr>
+            <a:r>
+              <a:rPr sz="1100" b="0" i="0">
+                <a:solidFill>
+                  <a:srgbClr val="B4C7D2"/>
+                </a:solidFill>
+                <a:latin typeface="Arial"/>
+              </a:rPr>
+              <a:t>P_load (power in)</a:t>
+            </a:r>
+          </a:p>
+        </p:txBody>
+      </p:sp>
+      <p:sp>
+        <p:nvSpPr>
+          <p:cNvPr id="18" name="C4-E12 rect 16" descr="sci-ppt:o016"/>
+          <p:cNvSpPr/>
+          <p:nvPr/>
+        </p:nvSpPr>
+        <p:spPr>
+          <a:xfrm>
+            <a:off x="1890979" y="2057400"/>
+            <a:ext cx="790041" cy="1131569"/>
+          </a:xfrm>
+          <a:prstGeom prst="rect">
+            <a:avLst/>
+          </a:prstGeom>
+          <a:solidFill>
+            <a:srgbClr val="7FC8F8">
+              <a:alpha val="85000"/>
+            </a:srgbClr>
+          </a:solidFill>
+          <a:ln w="12700">
+            <a:solidFill>
+              <a:srgbClr val="7FC8F8">
+                <a:alpha val="85000"/>
+              </a:srgbClr>
+            </a:solidFill>
+          </a:ln>
+          <a:effectLst/>
+        </p:spPr>
+        <p:txBody>
+          <a:bodyPr rtlCol="0" anchor="ctr"/>
+          <a:lstStyle/>
+          <a:p>
+            <a:pPr algn="ctr"/>
+          </a:p>
+        </p:txBody>
+      </p:sp>
+      <p:sp>
+        <p:nvSpPr>
+          <p:cNvPr id="19" name="C4-E12 text 17" descr="sci-ppt:o017"/>
+          <p:cNvSpPr txBox="1"/>
+          <p:nvPr/>
+        </p:nvSpPr>
+        <p:spPr>
+          <a:xfrm>
+            <a:off x="1662379" y="1783080"/>
+            <a:ext cx="1247241" cy="223900"/>
+          </a:xfrm>
+          <a:prstGeom prst="rect">
+            <a:avLst/>
+          </a:prstGeom>
+          <a:noFill/>
+          <a:effectLst/>
+        </p:spPr>
+        <p:txBody>
+          <a:bodyPr wrap="none" lIns="18288" rIns="18288" tIns="18288" bIns="18288" anchor="t">
+            <a:spAutoFit/>
+          </a:bodyPr>
+          <a:lstStyle/>
+          <a:p>
+            <a:pPr algn="ctr">
+              <a:spcAft>
+                <a:spcPts val="0"/>
+              </a:spcAft>
+            </a:pPr>
+            <a:r>
+              <a:rPr sz="1150" b="1" i="0">
+                <a:solidFill>
+                  <a:srgbClr val="E7F0F3"/>
+                </a:solidFill>
+                <a:latin typeface="Arial"/>
+              </a:rPr>
+              <a:t>-0.45</a:t>
+            </a:r>
+          </a:p>
+        </p:txBody>
+      </p:sp>
+      <p:sp>
+        <p:nvSpPr>
+          <p:cNvPr id="20" name="C4-E12 text 18" descr="sci-ppt:o018"/>
+          <p:cNvSpPr txBox="1"/>
+          <p:nvPr/>
+        </p:nvSpPr>
+        <p:spPr>
+          <a:xfrm>
+            <a:off x="1616659" y="4645152"/>
+            <a:ext cx="1338681" cy="216153"/>
+          </a:xfrm>
+          <a:prstGeom prst="rect">
+            <a:avLst/>
+          </a:prstGeom>
+          <a:noFill/>
+          <a:effectLst/>
+        </p:spPr>
+        <p:txBody>
+          <a:bodyPr wrap="none" lIns="18288" rIns="18288" tIns="18288" bIns="18288" anchor="t">
+            <a:spAutoFit/>
+          </a:bodyPr>
+          <a:lstStyle/>
+          <a:p>
+            <a:pPr algn="ctr">
+              <a:spcAft>
+                <a:spcPts val="0"/>
+              </a:spcAft>
+            </a:pPr>
+            <a:r>
+              <a:rPr sz="1100" b="0" i="0">
+                <a:solidFill>
+                  <a:srgbClr val="B4C7D2"/>
+                </a:solidFill>
+                <a:latin typeface="Arial"/>
+              </a:rPr>
+              <a:t>− dK/dt − dU/dt</a:t>
+            </a:r>
+          </a:p>
+        </p:txBody>
+      </p:sp>
+      <p:sp>
+        <p:nvSpPr>
+          <p:cNvPr id="21" name="C4-E12 rect 19" descr="sci-ppt:o019"/>
+          <p:cNvSpPr/>
+          <p:nvPr/>
+        </p:nvSpPr>
+        <p:spPr>
+          <a:xfrm>
+            <a:off x="2988259" y="3188970"/>
+            <a:ext cx="790041" cy="1005840"/>
+          </a:xfrm>
+          <a:prstGeom prst="rect">
+            <a:avLst/>
+          </a:prstGeom>
+          <a:solidFill>
+            <a:srgbClr val="F2B880">
+              <a:alpha val="85000"/>
+            </a:srgbClr>
+          </a:solidFill>
+          <a:ln w="12700">
+            <a:solidFill>
+              <a:srgbClr val="F2B880">
+                <a:alpha val="85000"/>
+              </a:srgbClr>
+            </a:solidFill>
+          </a:ln>
+          <a:effectLst/>
+        </p:spPr>
+        <p:txBody>
+          <a:bodyPr rtlCol="0" anchor="ctr"/>
+          <a:lstStyle/>
+          <a:p>
+            <a:pPr algn="ctr"/>
+          </a:p>
+        </p:txBody>
+      </p:sp>
+      <p:sp>
+        <p:nvSpPr>
+          <p:cNvPr id="22" name="C4-E12 text 20" descr="sci-ppt:o020"/>
+          <p:cNvSpPr txBox="1"/>
+          <p:nvPr/>
+        </p:nvSpPr>
+        <p:spPr>
+          <a:xfrm>
+            <a:off x="2759659" y="2914650"/>
+            <a:ext cx="1247241" cy="223900"/>
+          </a:xfrm>
+          <a:prstGeom prst="rect">
+            <a:avLst/>
+          </a:prstGeom>
+          <a:noFill/>
+          <a:effectLst/>
+        </p:spPr>
+        <p:txBody>
+          <a:bodyPr wrap="none" lIns="18288" rIns="18288" tIns="18288" bIns="18288" anchor="t">
+            <a:spAutoFit/>
+          </a:bodyPr>
+          <a:lstStyle/>
+          <a:p>
+            <a:pPr algn="ctr">
+              <a:spcAft>
+                <a:spcPts val="0"/>
+              </a:spcAft>
+            </a:pPr>
+            <a:r>
+              <a:rPr sz="1150" b="1" i="0">
+                <a:solidFill>
+                  <a:srgbClr val="E7F0F3"/>
+                </a:solidFill>
+                <a:latin typeface="Arial"/>
+              </a:rPr>
+              <a:t>-0.40</a:t>
+            </a:r>
+          </a:p>
+        </p:txBody>
+      </p:sp>
+      <p:sp>
+        <p:nvSpPr>
+          <p:cNvPr id="23" name="C4-E12 text 21" descr="sci-ppt:o021"/>
+          <p:cNvSpPr txBox="1"/>
+          <p:nvPr/>
+        </p:nvSpPr>
+        <p:spPr>
+          <a:xfrm>
+            <a:off x="2713939" y="4645152"/>
+            <a:ext cx="1338681" cy="386588"/>
+          </a:xfrm>
+          <a:prstGeom prst="rect">
+            <a:avLst/>
+          </a:prstGeom>
+          <a:noFill/>
+          <a:effectLst/>
+        </p:spPr>
+        <p:txBody>
+          <a:bodyPr wrap="none" lIns="18288" rIns="18288" tIns="18288" bIns="18288" anchor="t">
+            <a:spAutoFit/>
+          </a:bodyPr>
+          <a:lstStyle/>
+          <a:p>
+            <a:pPr algn="ctr">
+              <a:spcAft>
+                <a:spcPts val="0"/>
+              </a:spcAft>
+            </a:pPr>
+            <a:r>
+              <a:rPr sz="1100" b="0" i="0">
+                <a:solidFill>
+                  <a:srgbClr val="B4C7D2"/>
+                </a:solidFill>
+                <a:latin typeface="Arial"/>
+              </a:rPr>
+              <a:t>− Γ v_c ℓ</a:t>
+            </a:r>
+          </a:p>
+          <a:p>
+            <a:pPr algn="ctr">
+              <a:spcAft>
+                <a:spcPts val="0"/>
+              </a:spcAft>
+            </a:pPr>
+            <a:r>
+              <a:rPr sz="1100" b="0" i="0">
+                <a:solidFill>
+                  <a:srgbClr val="B4C7D2"/>
+                </a:solidFill>
+                <a:latin typeface="Arial"/>
+              </a:rPr>
+              <a:t>(fracture)</a:t>
+            </a:r>
+          </a:p>
+        </p:txBody>
+      </p:sp>
+      <p:sp>
+        <p:nvSpPr>
+          <p:cNvPr id="24" name="C4-E12 rect 22" descr="sci-ppt:o022"/>
+          <p:cNvSpPr/>
+          <p:nvPr/>
+        </p:nvSpPr>
+        <p:spPr>
+          <a:xfrm>
+            <a:off x="4085539" y="4194810"/>
+            <a:ext cx="790041" cy="377189"/>
+          </a:xfrm>
+          <a:prstGeom prst="rect">
+            <a:avLst/>
+          </a:prstGeom>
+          <a:solidFill>
+            <a:srgbClr val="F28BA0">
+              <a:alpha val="85000"/>
+            </a:srgbClr>
+          </a:solidFill>
+          <a:ln w="12700">
+            <a:solidFill>
+              <a:srgbClr val="F28BA0">
+                <a:alpha val="85000"/>
+              </a:srgbClr>
+            </a:solidFill>
+          </a:ln>
+          <a:effectLst/>
+        </p:spPr>
+        <p:txBody>
+          <a:bodyPr rtlCol="0" anchor="ctr"/>
+          <a:lstStyle/>
+          <a:p>
+            <a:pPr algn="ctr"/>
+          </a:p>
+        </p:txBody>
+      </p:sp>
+      <p:sp>
+        <p:nvSpPr>
+          <p:cNvPr id="25" name="C4-E12 text 23" descr="sci-ppt:o023"/>
+          <p:cNvSpPr txBox="1"/>
+          <p:nvPr/>
+        </p:nvSpPr>
+        <p:spPr>
+          <a:xfrm>
+            <a:off x="3856939" y="3920490"/>
+            <a:ext cx="1247241" cy="223900"/>
+          </a:xfrm>
+          <a:prstGeom prst="rect">
+            <a:avLst/>
+          </a:prstGeom>
+          <a:noFill/>
+          <a:effectLst/>
+        </p:spPr>
+        <p:txBody>
+          <a:bodyPr wrap="none" lIns="18288" rIns="18288" tIns="18288" bIns="18288" anchor="t">
+            <a:spAutoFit/>
+          </a:bodyPr>
+          <a:lstStyle/>
+          <a:p>
+            <a:pPr algn="ctr">
+              <a:spcAft>
+                <a:spcPts val="0"/>
+              </a:spcAft>
+            </a:pPr>
+            <a:r>
+              <a:rPr sz="1150" b="1" i="0">
+                <a:solidFill>
+                  <a:srgbClr val="E7F0F3"/>
+                </a:solidFill>
+                <a:latin typeface="Arial"/>
+              </a:rPr>
+              <a:t>-0.15</a:t>
+            </a:r>
+          </a:p>
+        </p:txBody>
+      </p:sp>
+      <p:sp>
+        <p:nvSpPr>
+          <p:cNvPr id="26" name="C4-E12 text 24" descr="sci-ppt:o024"/>
+          <p:cNvSpPr txBox="1"/>
+          <p:nvPr/>
+        </p:nvSpPr>
+        <p:spPr>
+          <a:xfrm>
+            <a:off x="3811219" y="4645152"/>
+            <a:ext cx="1338681" cy="216153"/>
+          </a:xfrm>
+          <a:prstGeom prst="rect">
+            <a:avLst/>
+          </a:prstGeom>
+          <a:noFill/>
+          <a:effectLst/>
+        </p:spPr>
+        <p:txBody>
+          <a:bodyPr wrap="none" lIns="18288" rIns="18288" tIns="18288" bIns="18288" anchor="t">
+            <a:spAutoFit/>
+          </a:bodyPr>
+          <a:lstStyle/>
+          <a:p>
+            <a:pPr algn="ctr">
+              <a:spcAft>
+                <a:spcPts val="0"/>
+              </a:spcAft>
+            </a:pPr>
+            <a:r>
+              <a:rPr sz="1100" b="0" i="0">
+                <a:solidFill>
+                  <a:srgbClr val="B4C7D2"/>
+                </a:solidFill>
+                <a:latin typeface="Arial"/>
+              </a:rPr>
+              <a:t>− Pₒₜₕₑᵣ</a:t>
+            </a:r>
+          </a:p>
+        </p:txBody>
+      </p:sp>
+      <p:sp>
+        <p:nvSpPr>
+          <p:cNvPr id="27" name="C4-E12 rect 25" descr="sci-ppt:o025"/>
+          <p:cNvSpPr/>
+          <p:nvPr/>
+        </p:nvSpPr>
+        <p:spPr>
+          <a:xfrm>
+            <a:off x="5182819" y="4572000"/>
+            <a:ext cx="790041" cy="18288"/>
+          </a:xfrm>
+          <a:prstGeom prst="rect">
+            <a:avLst/>
+          </a:prstGeom>
+          <a:solidFill>
+            <a:srgbClr val="B4C7D2">
+              <a:alpha val="85000"/>
+            </a:srgbClr>
+          </a:solidFill>
+          <a:ln w="12700">
+            <a:solidFill>
+              <a:srgbClr val="B4C7D2">
+                <a:alpha val="85000"/>
+              </a:srgbClr>
+            </a:solidFill>
+          </a:ln>
+          <a:effectLst/>
+        </p:spPr>
+        <p:txBody>
+          <a:bodyPr rtlCol="0" anchor="ctr"/>
+          <a:lstStyle/>
+          <a:p>
+            <a:pPr algn="ctr"/>
+          </a:p>
+        </p:txBody>
+      </p:sp>
+      <p:sp>
+        <p:nvSpPr>
+          <p:cNvPr id="28" name="C4-E12 text 26" descr="sci-ppt:o026"/>
+          <p:cNvSpPr txBox="1"/>
+          <p:nvPr/>
+        </p:nvSpPr>
+        <p:spPr>
+          <a:xfrm>
+            <a:off x="4954219" y="4297680"/>
+            <a:ext cx="1247241" cy="223900"/>
+          </a:xfrm>
+          <a:prstGeom prst="rect">
+            <a:avLst/>
+          </a:prstGeom>
+          <a:noFill/>
+          <a:effectLst/>
+        </p:spPr>
+        <p:txBody>
+          <a:bodyPr wrap="none" lIns="18288" rIns="18288" tIns="18288" bIns="18288" anchor="t">
+            <a:spAutoFit/>
+          </a:bodyPr>
+          <a:lstStyle/>
+          <a:p>
+            <a:pPr algn="ctr">
+              <a:spcAft>
+                <a:spcPts val="0"/>
+              </a:spcAft>
+            </a:pPr>
+            <a:r>
+              <a:rPr sz="1150" b="1" i="0">
+                <a:solidFill>
+                  <a:srgbClr val="E7F0F3"/>
+                </a:solidFill>
+                <a:latin typeface="Arial"/>
+              </a:rPr>
+              <a:t>0.00</a:t>
+            </a:r>
+          </a:p>
+        </p:txBody>
+      </p:sp>
+      <p:sp>
+        <p:nvSpPr>
+          <p:cNvPr id="29" name="C4-E12 text 27" descr="sci-ppt:o027"/>
+          <p:cNvSpPr txBox="1"/>
+          <p:nvPr/>
+        </p:nvSpPr>
+        <p:spPr>
+          <a:xfrm>
+            <a:off x="4908499" y="4645152"/>
+            <a:ext cx="1338681" cy="216153"/>
+          </a:xfrm>
+          <a:prstGeom prst="rect">
+            <a:avLst/>
+          </a:prstGeom>
+          <a:noFill/>
+          <a:effectLst/>
+        </p:spPr>
+        <p:txBody>
+          <a:bodyPr wrap="none" lIns="18288" rIns="18288" tIns="18288" bIns="18288" anchor="t">
+            <a:spAutoFit/>
+          </a:bodyPr>
+          <a:lstStyle/>
+          <a:p>
+            <a:pPr algn="ctr">
+              <a:spcAft>
+                <a:spcPts val="0"/>
+              </a:spcAft>
+            </a:pPr>
+            <a:r>
+              <a:rPr sz="1100" b="0" i="0">
+                <a:solidFill>
+                  <a:srgbClr val="B4C7D2"/>
+                </a:solidFill>
+                <a:latin typeface="Arial"/>
+              </a:rPr>
+              <a:t>= 0</a:t>
+            </a:r>
+          </a:p>
+        </p:txBody>
+      </p:sp>
+      <p:sp>
+        <p:nvSpPr>
+          <p:cNvPr id="30" name="C4-E12 round_rect 28" descr="sci-ppt:o028"/>
+          <p:cNvSpPr/>
+          <p:nvPr/>
+        </p:nvSpPr>
+        <p:spPr>
+          <a:xfrm>
+            <a:off x="6583680" y="914400"/>
+            <a:ext cx="5257800" cy="3931920"/>
+          </a:xfrm>
+          <a:prstGeom prst="roundRect">
+            <a:avLst/>
+          </a:prstGeom>
+          <a:solidFill>
+            <a:srgbClr val="213E4B"/>
+          </a:solidFill>
+          <a:ln w="20320">
+            <a:solidFill>
+              <a:srgbClr val="8EDBD4"/>
+            </a:solidFill>
+          </a:ln>
+          <a:effectLst/>
+        </p:spPr>
+        <p:txBody>
+          <a:bodyPr rtlCol="0" anchor="ctr"/>
+          <a:lstStyle/>
+          <a:p>
+            <a:pPr algn="ctr"/>
+          </a:p>
+        </p:txBody>
+      </p:sp>
+      <p:sp>
+        <p:nvSpPr>
+          <p:cNvPr id="31" name="C4-E12 text 29" descr="sci-ppt:o029"/>
+          <p:cNvSpPr txBox="1"/>
+          <p:nvPr/>
+        </p:nvSpPr>
+        <p:spPr>
+          <a:xfrm>
+            <a:off x="6693408" y="969264"/>
+            <a:ext cx="5038344" cy="254889"/>
+          </a:xfrm>
+          <a:prstGeom prst="rect">
+            <a:avLst/>
+          </a:prstGeom>
+          <a:noFill/>
+          <a:effectLst/>
+        </p:spPr>
+        <p:txBody>
+          <a:bodyPr wrap="none" lIns="18288" rIns="18288" tIns="18288" bIns="18288" anchor="t">
             <a:spAutoFit/>
           </a:bodyPr>
           <a:lstStyle/>
@@ -3491,27 +4129,419 @@
               </a:spcAft>
             </a:pPr>
             <a:r>
-              <a:rPr sz="1150" b="0" i="0">
+              <a:rPr sz="1350" b="1" i="0">
+                <a:solidFill>
+                  <a:srgbClr val="8EDBD4"/>
+                </a:solidFill>
+                <a:latin typeface="Arial"/>
+              </a:rPr>
+              <a:t>Dynamic balance on a moving crack</a:t>
+            </a:r>
+          </a:p>
+        </p:txBody>
+      </p:sp>
+      <p:sp>
+        <p:nvSpPr>
+          <p:cNvPr id="32" name="C4-E12 text 30" descr="sci-ppt:o030"/>
+          <p:cNvSpPr txBox="1"/>
+          <p:nvPr/>
+        </p:nvSpPr>
+        <p:spPr>
+          <a:xfrm>
+            <a:off x="6720840" y="1417320"/>
+            <a:ext cx="5029200" cy="231648"/>
+          </a:xfrm>
+          <a:prstGeom prst="rect">
+            <a:avLst/>
+          </a:prstGeom>
+          <a:noFill/>
+          <a:effectLst/>
+        </p:spPr>
+        <p:txBody>
+          <a:bodyPr wrap="none" lIns="18288" rIns="18288" tIns="18288" bIns="18288" anchor="t">
+            <a:spAutoFit/>
+          </a:bodyPr>
+          <a:lstStyle/>
+          <a:p>
+            <a:pPr algn="l">
+              <a:spcAft>
+                <a:spcPts val="0"/>
+              </a:spcAft>
+            </a:pPr>
+            <a:r>
+              <a:rPr sz="1200" b="1" i="0">
+                <a:solidFill>
+                  <a:srgbClr val="E7F0F3"/>
+                </a:solidFill>
+                <a:latin typeface="Arial"/>
+              </a:rPr>
+              <a:t>P_load = d(K_f + U_f)/dt + ∫ Γ v_c dℓ + Pₒₜₕₑᵣ</a:t>
+            </a:r>
+          </a:p>
+        </p:txBody>
+      </p:sp>
+      <p:sp>
+        <p:nvSpPr>
+          <p:cNvPr id="33" name="C4-E12 text 31" descr="sci-ppt:o031"/>
+          <p:cNvSpPr txBox="1"/>
+          <p:nvPr/>
+        </p:nvSpPr>
+        <p:spPr>
+          <a:xfrm>
+            <a:off x="6922007" y="2148840"/>
+            <a:ext cx="4828032" cy="231648"/>
+          </a:xfrm>
+          <a:prstGeom prst="rect">
+            <a:avLst/>
+          </a:prstGeom>
+          <a:noFill/>
+          <a:effectLst/>
+        </p:spPr>
+        <p:txBody>
+          <a:bodyPr wrap="none" lIns="18288" rIns="18288" tIns="18288" bIns="18288" anchor="t">
+            <a:spAutoFit/>
+          </a:bodyPr>
+          <a:lstStyle/>
+          <a:p>
+            <a:pPr algn="l">
+              <a:spcAft>
+                <a:spcPts val="0"/>
+              </a:spcAft>
+            </a:pPr>
+            <a:r>
+              <a:rPr sz="1200" b="0" i="0">
+                <a:solidFill>
+                  <a:srgbClr val="E7F0F3"/>
+                </a:solidFill>
+                <a:latin typeface="Arial"/>
+              </a:rPr>
+              <a:t>K_f: motion of the film, U_f: elastic energy.</a:t>
+            </a:r>
+          </a:p>
+        </p:txBody>
+      </p:sp>
+      <p:sp>
+        <p:nvSpPr>
+          <p:cNvPr id="34" name="C4-E12 ellipse 32" descr="sci-ppt:o032"/>
+          <p:cNvSpPr/>
+          <p:nvPr/>
+        </p:nvSpPr>
+        <p:spPr>
+          <a:xfrm>
+            <a:off x="6752844" y="2202180"/>
+            <a:ext cx="82296" cy="82296"/>
+          </a:xfrm>
+          <a:prstGeom prst="ellipse">
+            <a:avLst/>
+          </a:prstGeom>
+          <a:solidFill>
+            <a:srgbClr val="8EDBD4"/>
+          </a:solidFill>
+          <a:ln w="12700">
+            <a:solidFill>
+              <a:srgbClr val="8EDBD4"/>
+            </a:solidFill>
+          </a:ln>
+          <a:effectLst/>
+        </p:spPr>
+        <p:txBody>
+          <a:bodyPr rtlCol="0" anchor="ctr"/>
+          <a:lstStyle/>
+          <a:p>
+            <a:pPr algn="ctr"/>
+          </a:p>
+        </p:txBody>
+      </p:sp>
+      <p:sp>
+        <p:nvSpPr>
+          <p:cNvPr id="35" name="C4-E12 text 33" descr="sci-ppt:o033"/>
+          <p:cNvSpPr txBox="1"/>
+          <p:nvPr/>
+        </p:nvSpPr>
+        <p:spPr>
+          <a:xfrm>
+            <a:off x="6922007" y="2426208"/>
+            <a:ext cx="4828032" cy="231648"/>
+          </a:xfrm>
+          <a:prstGeom prst="rect">
+            <a:avLst/>
+          </a:prstGeom>
+          <a:noFill/>
+          <a:effectLst/>
+        </p:spPr>
+        <p:txBody>
+          <a:bodyPr wrap="none" lIns="18288" rIns="18288" tIns="18288" bIns="18288" anchor="t">
+            <a:spAutoFit/>
+          </a:bodyPr>
+          <a:lstStyle/>
+          <a:p>
+            <a:pPr algn="l">
+              <a:spcAft>
+                <a:spcPts val="0"/>
+              </a:spcAft>
+            </a:pPr>
+            <a:r>
+              <a:rPr sz="1200" b="0" i="0">
+                <a:solidFill>
+                  <a:srgbClr val="E7F0F3"/>
+                </a:solidFill>
+                <a:latin typeface="Arial"/>
+              </a:rPr>
+              <a:t>Γ v_c along the front length is the fracture power.</a:t>
+            </a:r>
+          </a:p>
+        </p:txBody>
+      </p:sp>
+      <p:sp>
+        <p:nvSpPr>
+          <p:cNvPr id="36" name="C4-E12 ellipse 34" descr="sci-ppt:o034"/>
+          <p:cNvSpPr/>
+          <p:nvPr/>
+        </p:nvSpPr>
+        <p:spPr>
+          <a:xfrm>
+            <a:off x="6752844" y="2479548"/>
+            <a:ext cx="82296" cy="82296"/>
+          </a:xfrm>
+          <a:prstGeom prst="ellipse">
+            <a:avLst/>
+          </a:prstGeom>
+          <a:solidFill>
+            <a:srgbClr val="8EDBD4"/>
+          </a:solidFill>
+          <a:ln w="12700">
+            <a:solidFill>
+              <a:srgbClr val="8EDBD4"/>
+            </a:solidFill>
+          </a:ln>
+          <a:effectLst/>
+        </p:spPr>
+        <p:txBody>
+          <a:bodyPr rtlCol="0" anchor="ctr"/>
+          <a:lstStyle/>
+          <a:p>
+            <a:pPr algn="ctr"/>
+          </a:p>
+        </p:txBody>
+      </p:sp>
+      <p:sp>
+        <p:nvSpPr>
+          <p:cNvPr id="37" name="C4-E12 text 35" descr="sci-ppt:o035"/>
+          <p:cNvSpPr txBox="1"/>
+          <p:nvPr/>
+        </p:nvSpPr>
+        <p:spPr>
+          <a:xfrm>
+            <a:off x="6922007" y="2703576"/>
+            <a:ext cx="4828032" cy="231648"/>
+          </a:xfrm>
+          <a:prstGeom prst="rect">
+            <a:avLst/>
+          </a:prstGeom>
+          <a:noFill/>
+          <a:effectLst/>
+        </p:spPr>
+        <p:txBody>
+          <a:bodyPr wrap="none" lIns="18288" rIns="18288" tIns="18288" bIns="18288" anchor="t">
+            <a:spAutoFit/>
+          </a:bodyPr>
+          <a:lstStyle/>
+          <a:p>
+            <a:pPr algn="l">
+              <a:spcAft>
+                <a:spcPts val="0"/>
+              </a:spcAft>
+            </a:pPr>
+            <a:r>
+              <a:rPr sz="1200" b="0" i="0">
+                <a:solidFill>
+                  <a:srgbClr val="E7F0F3"/>
+                </a:solidFill>
+                <a:latin typeface="Arial"/>
+              </a:rPr>
+              <a:t>Pₒₜₕₑᵣ: dissipation or radiation not otherwise counted.</a:t>
+            </a:r>
+          </a:p>
+        </p:txBody>
+      </p:sp>
+      <p:sp>
+        <p:nvSpPr>
+          <p:cNvPr id="38" name="C4-E12 ellipse 36" descr="sci-ppt:o036"/>
+          <p:cNvSpPr/>
+          <p:nvPr/>
+        </p:nvSpPr>
+        <p:spPr>
+          <a:xfrm>
+            <a:off x="6752844" y="2756916"/>
+            <a:ext cx="82296" cy="82296"/>
+          </a:xfrm>
+          <a:prstGeom prst="ellipse">
+            <a:avLst/>
+          </a:prstGeom>
+          <a:solidFill>
+            <a:srgbClr val="8EDBD4"/>
+          </a:solidFill>
+          <a:ln w="12700">
+            <a:solidFill>
+              <a:srgbClr val="8EDBD4"/>
+            </a:solidFill>
+          </a:ln>
+          <a:effectLst/>
+        </p:spPr>
+        <p:txBody>
+          <a:bodyPr rtlCol="0" anchor="ctr"/>
+          <a:lstStyle/>
+          <a:p>
+            <a:pPr algn="ctr"/>
+          </a:p>
+        </p:txBody>
+      </p:sp>
+      <p:sp>
+        <p:nvSpPr>
+          <p:cNvPr id="39" name="C4-E12 text 37" descr="sci-ppt:o037"/>
+          <p:cNvSpPr txBox="1"/>
+          <p:nvPr/>
+        </p:nvSpPr>
+        <p:spPr>
+          <a:xfrm>
+            <a:off x="6720840" y="3657600"/>
+            <a:ext cx="5029200" cy="417576"/>
+          </a:xfrm>
+          <a:prstGeom prst="rect">
+            <a:avLst/>
+          </a:prstGeom>
+          <a:noFill/>
+          <a:effectLst/>
+        </p:spPr>
+        <p:txBody>
+          <a:bodyPr wrap="none" lIns="18288" rIns="18288" tIns="18288" bIns="18288" anchor="t">
+            <a:spAutoFit/>
+          </a:bodyPr>
+          <a:lstStyle/>
+          <a:p>
+            <a:pPr algn="l">
+              <a:spcAft>
+                <a:spcPts val="0"/>
+              </a:spcAft>
+            </a:pPr>
+            <a:r>
+              <a:rPr sz="1200" b="0" i="0">
+                <a:solidFill>
+                  <a:srgbClr val="F2B880"/>
+                </a:solidFill>
+                <a:latin typeface="Arial"/>
+              </a:rPr>
+              <a:t>Part of the load work is stored as kinetic energy before the</a:t>
+            </a:r>
+          </a:p>
+          <a:p>
+            <a:pPr algn="l">
+              <a:spcAft>
+                <a:spcPts val="0"/>
+              </a:spcAft>
+            </a:pPr>
+            <a:r>
+              <a:rPr sz="1200" b="0" i="0">
+                <a:solidFill>
+                  <a:srgbClr val="F2B880"/>
+                </a:solidFill>
+                <a:latin typeface="Arial"/>
+              </a:rPr>
+              <a:t>crack moves.</a:t>
+            </a:r>
+          </a:p>
+        </p:txBody>
+      </p:sp>
+      <p:sp>
+        <p:nvSpPr>
+          <p:cNvPr id="40" name="C4-E12 text 38" descr="sci-ppt:o038"/>
+          <p:cNvSpPr txBox="1"/>
+          <p:nvPr/>
+        </p:nvSpPr>
+        <p:spPr>
+          <a:xfrm>
+            <a:off x="457200" y="5120640"/>
+            <a:ext cx="11247120" cy="239395"/>
+          </a:xfrm>
+          <a:prstGeom prst="rect">
+            <a:avLst/>
+          </a:prstGeom>
+          <a:noFill/>
+          <a:effectLst/>
+        </p:spPr>
+        <p:txBody>
+          <a:bodyPr wrap="none" lIns="18288" rIns="18288" tIns="18288" bIns="18288" anchor="t">
+            <a:spAutoFit/>
+          </a:bodyPr>
+          <a:lstStyle/>
+          <a:p>
+            <a:pPr algn="l">
+              <a:spcAft>
+                <a:spcPts val="0"/>
+              </a:spcAft>
+            </a:pPr>
+            <a:r>
+              <a:rPr sz="1250" b="0" i="0">
+                <a:solidFill>
+                  <a:srgbClr val="E7F0F3"/>
+                </a:solidFill>
+                <a:latin typeface="Arial"/>
+              </a:rPr>
+              <a:t>Quasistatic G ≥ Γ is the slow limit of this balance (K_f → 0).</a:t>
+            </a:r>
+          </a:p>
+        </p:txBody>
+      </p:sp>
+      <p:sp>
+        <p:nvSpPr>
+          <p:cNvPr id="41" name="C4-E12 text 39" descr="sci-ppt:o039"/>
+          <p:cNvSpPr txBox="1"/>
+          <p:nvPr/>
+        </p:nvSpPr>
+        <p:spPr>
+          <a:xfrm>
+            <a:off x="457200" y="5623560"/>
+            <a:ext cx="11247120" cy="231648"/>
+          </a:xfrm>
+          <a:prstGeom prst="rect">
+            <a:avLst/>
+          </a:prstGeom>
+          <a:noFill/>
+          <a:effectLst/>
+        </p:spPr>
+        <p:txBody>
+          <a:bodyPr wrap="none" lIns="18288" rIns="18288" tIns="18288" bIns="18288" anchor="t">
+            <a:spAutoFit/>
+          </a:bodyPr>
+          <a:lstStyle/>
+          <a:p>
+            <a:pPr algn="l">
+              <a:spcAft>
+                <a:spcPts val="0"/>
+              </a:spcAft>
+            </a:pPr>
+            <a:r>
+              <a:rPr sz="1200" b="0" i="0">
                 <a:solidFill>
                   <a:srgbClr val="B4C7D2"/>
                 </a:solidFill>
                 <a:latin typeface="Arial"/>
               </a:rPr>
-              <a:t>• P_load → solid power</a:t>
-            </a:r>
-          </a:p>
-        </p:txBody>
-      </p:sp>
-      <p:sp>
-        <p:nvSpPr>
-          <p:cNvPr id="14" name="C4-E12 text 12" descr="sci-ppt:o012"/>
+              <a:t>Conditional: needs a fracture-resistance law Γ(ψ, Tᵢ, v_c) for the actual interface.</a:t>
+            </a:r>
+          </a:p>
+        </p:txBody>
+      </p:sp>
+      <p:sp>
+        <p:nvSpPr>
+          <p:cNvPr id="42" name="C4-E12 text 40" descr="sci-ppt:o040"/>
           <p:cNvSpPr txBox="1"/>
           <p:nvPr/>
         </p:nvSpPr>
         <p:spPr>
           <a:xfrm>
-            <a:off x="6217920" y="4096512"/>
-            <a:ext cx="5715000" cy="246888"/>
+            <a:off x="320040" y="6510528"/>
+            <a:ext cx="11521440" cy="200660"/>
           </a:xfrm>
           <a:prstGeom prst="rect">
             <a:avLst/>
@@ -3520,247 +4550,7 @@
           <a:effectLst/>
         </p:spPr>
         <p:txBody>
-          <a:bodyPr wrap="square" lIns="27432" rIns="27432" tIns="18288" bIns="18288" anchor="ctr">
-            <a:spAutoFit/>
-          </a:bodyPr>
-          <a:lstStyle/>
-          <a:p>
-            <a:pPr algn="l">
-              <a:spcAft>
-                <a:spcPts val="0"/>
-              </a:spcAft>
-            </a:pPr>
-            <a:r>
-              <a:rPr sz="1150" b="0" i="0">
-                <a:solidFill>
-                  <a:srgbClr val="B4C7D2"/>
-                </a:solidFill>
-                <a:latin typeface="Arial"/>
-              </a:rPr>
-              <a:t>• K_f — motion storage</a:t>
-            </a:r>
-          </a:p>
-        </p:txBody>
-      </p:sp>
-      <p:sp>
-        <p:nvSpPr>
-          <p:cNvPr id="15" name="C4-E12 text 13" descr="sci-ppt:o013"/>
-          <p:cNvSpPr txBox="1"/>
-          <p:nvPr/>
-        </p:nvSpPr>
-        <p:spPr>
-          <a:xfrm>
-            <a:off x="320040" y="4329684"/>
-            <a:ext cx="5715000" cy="246888"/>
-          </a:xfrm>
-          <a:prstGeom prst="rect">
-            <a:avLst/>
-          </a:prstGeom>
-          <a:noFill/>
-          <a:effectLst/>
-        </p:spPr>
-        <p:txBody>
-          <a:bodyPr wrap="square" lIns="27432" rIns="27432" tIns="18288" bIns="18288" anchor="ctr">
-            <a:spAutoFit/>
-          </a:bodyPr>
-          <a:lstStyle/>
-          <a:p>
-            <a:pPr algn="l">
-              <a:spcAft>
-                <a:spcPts val="0"/>
-              </a:spcAft>
-            </a:pPr>
-            <a:r>
-              <a:rPr sz="1150" b="0" i="0">
-                <a:solidFill>
-                  <a:srgbClr val="B4C7D2"/>
-                </a:solidFill>
-                <a:latin typeface="Arial"/>
-              </a:rPr>
-              <a:t>• U_f — elastic storage</a:t>
-            </a:r>
-          </a:p>
-        </p:txBody>
-      </p:sp>
-      <p:sp>
-        <p:nvSpPr>
-          <p:cNvPr id="16" name="C4-E12 text 14" descr="sci-ppt:o014"/>
-          <p:cNvSpPr txBox="1"/>
-          <p:nvPr/>
-        </p:nvSpPr>
-        <p:spPr>
-          <a:xfrm>
-            <a:off x="6217920" y="4329684"/>
-            <a:ext cx="5715000" cy="246888"/>
-          </a:xfrm>
-          <a:prstGeom prst="rect">
-            <a:avLst/>
-          </a:prstGeom>
-          <a:noFill/>
-          <a:effectLst/>
-        </p:spPr>
-        <p:txBody>
-          <a:bodyPr wrap="square" lIns="27432" rIns="27432" tIns="18288" bIns="18288" anchor="ctr">
-            <a:spAutoFit/>
-          </a:bodyPr>
-          <a:lstStyle/>
-          <a:p>
-            <a:pPr algn="l">
-              <a:spcAft>
-                <a:spcPts val="0"/>
-              </a:spcAft>
-            </a:pPr>
-            <a:r>
-              <a:rPr sz="1150" b="0" i="0">
-                <a:solidFill>
-                  <a:srgbClr val="B4C7D2"/>
-                </a:solidFill>
-                <a:latin typeface="Arial"/>
-              </a:rPr>
-              <a:t>• L_c, dℓ, v_c → new crack area/time</a:t>
-            </a:r>
-          </a:p>
-        </p:txBody>
-      </p:sp>
-      <p:sp>
-        <p:nvSpPr>
-          <p:cNvPr id="17" name="C4-E12 text 15" descr="sci-ppt:o015"/>
-          <p:cNvSpPr txBox="1"/>
-          <p:nvPr/>
-        </p:nvSpPr>
-        <p:spPr>
-          <a:xfrm>
-            <a:off x="320040" y="4562856"/>
-            <a:ext cx="5715000" cy="246888"/>
-          </a:xfrm>
-          <a:prstGeom prst="rect">
-            <a:avLst/>
-          </a:prstGeom>
-          <a:noFill/>
-          <a:effectLst/>
-        </p:spPr>
-        <p:txBody>
-          <a:bodyPr wrap="square" lIns="27432" rIns="27432" tIns="18288" bIns="18288" anchor="ctr">
-            <a:spAutoFit/>
-          </a:bodyPr>
-          <a:lstStyle/>
-          <a:p>
-            <a:pPr algn="l">
-              <a:spcAft>
-                <a:spcPts val="0"/>
-              </a:spcAft>
-            </a:pPr>
-            <a:r>
-              <a:rPr sz="1150" b="0" i="0">
-                <a:solidFill>
-                  <a:srgbClr val="B4C7D2"/>
-                </a:solidFill>
-                <a:latin typeface="Arial"/>
-              </a:rPr>
-              <a:t>• Γ(ψ,T_i,v_c) → fracture consumption</a:t>
-            </a:r>
-          </a:p>
-        </p:txBody>
-      </p:sp>
-      <p:sp>
-        <p:nvSpPr>
-          <p:cNvPr id="18" name="C4-E12 text 16" descr="sci-ppt:o016"/>
-          <p:cNvSpPr txBox="1"/>
-          <p:nvPr/>
-        </p:nvSpPr>
-        <p:spPr>
-          <a:xfrm>
-            <a:off x="6217920" y="4562856"/>
-            <a:ext cx="5715000" cy="246888"/>
-          </a:xfrm>
-          <a:prstGeom prst="rect">
-            <a:avLst/>
-          </a:prstGeom>
-          <a:noFill/>
-          <a:effectLst/>
-        </p:spPr>
-        <p:txBody>
-          <a:bodyPr wrap="square" lIns="27432" rIns="27432" tIns="18288" bIns="18288" anchor="ctr">
-            <a:spAutoFit/>
-          </a:bodyPr>
-          <a:lstStyle/>
-          <a:p>
-            <a:pPr algn="l">
-              <a:spcAft>
-                <a:spcPts val="0"/>
-              </a:spcAft>
-            </a:pPr>
-            <a:r>
-              <a:rPr sz="1150" b="0" i="0">
-                <a:solidFill>
-                  <a:srgbClr val="B4C7D2"/>
-                </a:solidFill>
-                <a:latin typeface="Arial"/>
-              </a:rPr>
-              <a:t>• P_other → other losses</a:t>
-            </a:r>
-          </a:p>
-        </p:txBody>
-      </p:sp>
-      <p:sp>
-        <p:nvSpPr>
-          <p:cNvPr id="19" name="C4-E12 text 17" descr="sci-ppt:o017"/>
-          <p:cNvSpPr txBox="1"/>
-          <p:nvPr/>
-        </p:nvSpPr>
-        <p:spPr>
-          <a:xfrm>
-            <a:off x="320040" y="5596128"/>
-            <a:ext cx="11430000" cy="292608"/>
-          </a:xfrm>
-          <a:prstGeom prst="rect">
-            <a:avLst/>
-          </a:prstGeom>
-          <a:noFill/>
-          <a:effectLst/>
-        </p:spPr>
-        <p:txBody>
-          <a:bodyPr wrap="square" lIns="27432" rIns="27432" tIns="18288" bIns="18288" anchor="ctr">
-            <a:spAutoFit/>
-          </a:bodyPr>
-          <a:lstStyle/>
-          <a:p>
-            <a:pPr algn="l">
-              <a:spcAft>
-                <a:spcPts val="0"/>
-              </a:spcAft>
-            </a:pPr>
-            <a:r>
-              <a:rPr sz="1150" b="0" i="0">
-                <a:solidFill>
-                  <a:srgbClr val="8EDBD4"/>
-                </a:solidFill>
-                <a:latin typeface="Arial"/>
-              </a:rPr>
-              <a:t>Crack dissipation is counted once.</a:t>
-            </a:r>
-          </a:p>
-        </p:txBody>
-      </p:sp>
-      <p:sp>
-        <p:nvSpPr>
-          <p:cNvPr id="20" name="C4-E12 text 18" descr="sci-ppt:o018"/>
-          <p:cNvSpPr txBox="1"/>
-          <p:nvPr/>
-        </p:nvSpPr>
-        <p:spPr>
-          <a:xfrm>
-            <a:off x="320040" y="6473952"/>
-            <a:ext cx="11430000" cy="256032"/>
-          </a:xfrm>
-          <a:prstGeom prst="rect">
-            <a:avLst/>
-          </a:prstGeom>
-          <a:noFill/>
-          <a:effectLst/>
-        </p:spPr>
-        <p:txBody>
-          <a:bodyPr wrap="square" lIns="27432" rIns="27432" tIns="18288" bIns="18288" anchor="ctr">
+          <a:bodyPr wrap="none" lIns="18288" rIns="18288" tIns="18288" bIns="18288" anchor="t">
             <a:spAutoFit/>
           </a:bodyPr>
           <a:lstStyle/>
@@ -3777,7 +4567,7 @@
                 </a:solidFill>
                 <a:latin typeface="Arial"/>
               </a:rPr>
-              <a:t>Model schematic; geometry is not to scale.</a:t>
+              <a:t>Dynamic energy balance of Eq. C4-E12; shares are illustrative.</a:t>
             </a:r>
           </a:p>
         </p:txBody>
